--- a/spring/sem_6_allocators/presentations/sem_6_allocators.pptx
+++ b/spring/sem_6_allocators/presentations/sem_6_allocators.pptx
@@ -4024,11 +4024,7 @@
             </a:r>
             <a:r>
               <a:rPr lang="ru-RU" dirty="0"/>
-              <a:t>, если этот </a:t>
-            </a:r>
-            <a:r>
-              <a:rPr lang="ru-RU"/>
-              <a:t>флаг выставлен.</a:t>
+              <a:t>, если этот флаг выставлен.</a:t>
             </a:r>
             <a:endParaRPr lang="ru-RU" b="1" dirty="0"/>
           </a:p>
